--- a/PPT/IskolaiEsemenykezelo_Prezentacio.pptx
+++ b/PPT/IskolaiEsemenykezelo_Prezentacio.pptx
@@ -310,7 +310,7 @@
               <a:rPr lang="en-US"/>
               <a:t>1</a:t>
             </a:fld>
-            <a:endParaRPr lang="en-US"/>
+            <a:endParaRPr lang="en-US" dirty="0"/>
           </a:p>
         </p:txBody>
       </p:sp>
@@ -394,7 +394,7 @@
               <a:rPr lang="en-US"/>
               <a:t>2</a:t>
             </a:fld>
-            <a:endParaRPr lang="en-US"/>
+            <a:endParaRPr lang="en-US" dirty="0"/>
           </a:p>
         </p:txBody>
       </p:sp>
@@ -478,7 +478,7 @@
               <a:rPr lang="en-US"/>
               <a:t>3</a:t>
             </a:fld>
-            <a:endParaRPr lang="en-US"/>
+            <a:endParaRPr lang="en-US" dirty="0"/>
           </a:p>
         </p:txBody>
       </p:sp>
@@ -562,7 +562,7 @@
               <a:rPr lang="en-US"/>
               <a:t>4</a:t>
             </a:fld>
-            <a:endParaRPr lang="en-US"/>
+            <a:endParaRPr lang="en-US" dirty="0"/>
           </a:p>
         </p:txBody>
       </p:sp>
@@ -646,7 +646,7 @@
               <a:rPr lang="en-US"/>
               <a:t>5</a:t>
             </a:fld>
-            <a:endParaRPr lang="en-US"/>
+            <a:endParaRPr lang="en-US" dirty="0"/>
           </a:p>
         </p:txBody>
       </p:sp>
@@ -730,7 +730,7 @@
               <a:rPr lang="en-US"/>
               <a:t>6</a:t>
             </a:fld>
-            <a:endParaRPr lang="en-US"/>
+            <a:endParaRPr lang="en-US" dirty="0"/>
           </a:p>
         </p:txBody>
       </p:sp>
@@ -814,7 +814,7 @@
               <a:rPr lang="en-US"/>
               <a:t>7</a:t>
             </a:fld>
-            <a:endParaRPr lang="en-US"/>
+            <a:endParaRPr lang="en-US" dirty="0"/>
           </a:p>
         </p:txBody>
       </p:sp>
@@ -2518,7 +2518,7 @@
         <p:spPr>
           <a:xfrm>
             <a:off x="6355080" y="1097280"/>
-            <a:ext cx="2834640" cy="3749040"/>
+            <a:ext cx="2629060" cy="3749040"/>
           </a:xfrm>
           <a:prstGeom prst="rect">
             <a:avLst/>
@@ -2550,7 +2550,7 @@
         <p:spPr>
           <a:xfrm>
             <a:off x="6355080" y="1097280"/>
-            <a:ext cx="2834640" cy="475488"/>
+            <a:ext cx="2629060" cy="475488"/>
           </a:xfrm>
           <a:prstGeom prst="rect">
             <a:avLst/>
@@ -4646,13 +4646,13 @@
       </p:sp>
       <p:sp>
         <p:nvSpPr>
-          <p:cNvPr id="5" name="Text 3"/>
-          <p:cNvSpPr/>
-          <p:nvPr/>
-        </p:nvSpPr>
-        <p:spPr>
-          <a:xfrm>
-            <a:off x="685800" y="1709928"/>
+          <p:cNvPr id="6" name="Text 4"/>
+          <p:cNvSpPr/>
+          <p:nvPr/>
+        </p:nvSpPr>
+        <p:spPr>
+          <a:xfrm>
+            <a:off x="685800" y="1719072"/>
             <a:ext cx="8046720" cy="420624"/>
           </a:xfrm>
           <a:prstGeom prst="rect">
@@ -4677,7 +4677,7 @@
                 <a:ea typeface="Calibri" pitchFamily="34" charset="-122"/>
                 <a:cs typeface="Calibri" pitchFamily="34" charset="-120"/>
               </a:rPr>
-              <a:t>✅  CRUD műveletek eseményekre (létrehozás, olvasás, módosítás, törlés)</a:t>
+              <a:t>✅  Kétszintű jogosultság: felhasználó és adminisztrátor</a:t>
             </a:r>
             <a:endParaRPr lang="en-US" sz="1350" dirty="0"/>
           </a:p>
@@ -4685,13 +4685,13 @@
       </p:sp>
       <p:sp>
         <p:nvSpPr>
-          <p:cNvPr id="6" name="Text 4"/>
-          <p:cNvSpPr/>
-          <p:nvPr/>
-        </p:nvSpPr>
-        <p:spPr>
-          <a:xfrm>
-            <a:off x="685800" y="2185416"/>
+          <p:cNvPr id="7" name="Text 5"/>
+          <p:cNvSpPr/>
+          <p:nvPr/>
+        </p:nvSpPr>
+        <p:spPr>
+          <a:xfrm>
+            <a:off x="685800" y="2197608"/>
             <a:ext cx="8046720" cy="420624"/>
           </a:xfrm>
           <a:prstGeom prst="rect">
@@ -4716,7 +4716,7 @@
                 <a:ea typeface="Calibri" pitchFamily="34" charset="-122"/>
                 <a:cs typeface="Calibri" pitchFamily="34" charset="-120"/>
               </a:rPr>
-              <a:t>✅  Kétszintű jogosultság: felhasználó és adminisztrátor</a:t>
+              <a:t>✅  Eseményre való jelentkezés és lemondás adatbázis-szinten</a:t>
             </a:r>
             <a:endParaRPr lang="en-US" sz="1350" dirty="0"/>
           </a:p>
@@ -4724,7 +4724,7 @@
       </p:sp>
       <p:sp>
         <p:nvSpPr>
-          <p:cNvPr id="7" name="Text 5"/>
+          <p:cNvPr id="8" name="Text 6"/>
           <p:cNvSpPr/>
           <p:nvPr/>
         </p:nvSpPr>
@@ -4755,7 +4755,7 @@
                 <a:ea typeface="Calibri" pitchFamily="34" charset="-122"/>
                 <a:cs typeface="Calibri" pitchFamily="34" charset="-120"/>
               </a:rPr>
-              <a:t>✅  Eseményre való jelentkezés és lemondás adatbázis-szinten</a:t>
+              <a:t>✅  Admin jóváhagyásos regisztráció munkafolyamat</a:t>
             </a:r>
             <a:endParaRPr lang="en-US" sz="1350" dirty="0"/>
           </a:p>
@@ -4763,13 +4763,13 @@
       </p:sp>
       <p:sp>
         <p:nvSpPr>
-          <p:cNvPr id="8" name="Text 6"/>
-          <p:cNvSpPr/>
-          <p:nvPr/>
-        </p:nvSpPr>
-        <p:spPr>
-          <a:xfrm>
-            <a:off x="685800" y="3136392"/>
+          <p:cNvPr id="9" name="Text 7"/>
+          <p:cNvSpPr/>
+          <p:nvPr/>
+        </p:nvSpPr>
+        <p:spPr>
+          <a:xfrm>
+            <a:off x="685800" y="3139440"/>
             <a:ext cx="8046720" cy="420624"/>
           </a:xfrm>
           <a:prstGeom prst="rect">
@@ -4794,7 +4794,7 @@
                 <a:ea typeface="Calibri" pitchFamily="34" charset="-122"/>
                 <a:cs typeface="Calibri" pitchFamily="34" charset="-120"/>
               </a:rPr>
-              <a:t>✅  Admin jóváhagyásos regisztráció munkafolyamat</a:t>
+              <a:t>✅  Dinamikus szűrés és keresés a listanézetekben</a:t>
             </a:r>
             <a:endParaRPr lang="en-US" sz="1350" dirty="0"/>
           </a:p>
@@ -4802,14 +4802,14 @@
       </p:sp>
       <p:sp>
         <p:nvSpPr>
-          <p:cNvPr id="9" name="Text 7"/>
-          <p:cNvSpPr/>
-          <p:nvPr/>
-        </p:nvSpPr>
-        <p:spPr>
-          <a:xfrm>
-            <a:off x="685800" y="3611880"/>
-            <a:ext cx="8046720" cy="420624"/>
+          <p:cNvPr id="10" name="Text 8"/>
+          <p:cNvSpPr/>
+          <p:nvPr/>
+        </p:nvSpPr>
+        <p:spPr>
+          <a:xfrm>
+            <a:off x="594360" y="4480560"/>
+            <a:ext cx="7772400" cy="411480"/>
           </a:xfrm>
           <a:prstGeom prst="rect">
             <a:avLst/>
@@ -4825,46 +4825,18 @@
               <a:buNone/>
             </a:pPr>
             <a:r>
-              <a:rPr lang="en-US" sz="1350" dirty="0">
-                <a:solidFill>
-                  <a:srgbClr val="CADCFC"/>
+              <a:rPr lang="en-US" sz="1700" b="1" dirty="0">
+                <a:solidFill>
+                  <a:srgbClr val="3B82F6"/>
                 </a:solidFill>
                 <a:latin typeface="Calibri" pitchFamily="34" charset="0"/>
                 <a:ea typeface="Calibri" pitchFamily="34" charset="-122"/>
                 <a:cs typeface="Calibri" pitchFamily="34" charset="-120"/>
               </a:rPr>
-              <a:t>✅  Dinamikus szűrés és keresés a listanézetekben</a:t>
-            </a:r>
-            <a:endParaRPr lang="en-US" sz="1350" dirty="0"/>
-          </a:p>
-        </p:txBody>
-      </p:sp>
-      <p:sp>
-        <p:nvSpPr>
-          <p:cNvPr id="10" name="Text 8"/>
-          <p:cNvSpPr/>
-          <p:nvPr/>
-        </p:nvSpPr>
-        <p:spPr>
-          <a:xfrm>
-            <a:off x="594360" y="4480560"/>
-            <a:ext cx="7772400" cy="411480"/>
-          </a:xfrm>
-          <a:prstGeom prst="rect">
-            <a:avLst/>
-          </a:prstGeom>
-          <a:noFill/>
-          <a:ln/>
-        </p:spPr>
-        <p:txBody>
-          <a:bodyPr wrap="square" lIns="0" tIns="0" rIns="0" bIns="0" rtlCol="0" anchor="ctr"/>
-          <a:lstStyle/>
-          <a:p>
-            <a:pPr marL="0" indent="0" algn="l">
-              <a:buNone/>
-            </a:pPr>
-            <a:r>
-              <a:rPr lang="en-US" sz="1700" b="1" dirty="0">
+              <a:t>Köszön</a:t>
+            </a:r>
+            <a:r>
+              <a:rPr lang="hu-HU" sz="1700" b="1" dirty="0">
                 <a:solidFill>
                   <a:srgbClr val="3B82F6"/>
                 </a:solidFill>
@@ -4872,7 +4844,18 @@
                 <a:ea typeface="Calibri" pitchFamily="34" charset="-122"/>
                 <a:cs typeface="Calibri" pitchFamily="34" charset="-120"/>
               </a:rPr>
-              <a:t>Köszönöm a figyelmet!</a:t>
+              <a:t>jük</a:t>
+            </a:r>
+            <a:r>
+              <a:rPr lang="en-US" sz="1700" b="1" dirty="0">
+                <a:solidFill>
+                  <a:srgbClr val="3B82F6"/>
+                </a:solidFill>
+                <a:latin typeface="Calibri" pitchFamily="34" charset="0"/>
+                <a:ea typeface="Calibri" pitchFamily="34" charset="-122"/>
+                <a:cs typeface="Calibri" pitchFamily="34" charset="-120"/>
+              </a:rPr>
+              <a:t> a figyelmet!</a:t>
             </a:r>
             <a:endParaRPr lang="en-US" sz="1700" dirty="0"/>
           </a:p>
